--- a/koreatech-db/theory/이론3장_관계형_데이터_모델.pptx
+++ b/koreatech-db/theory/이론3장_관계형_데이터_모델.pptx
@@ -6533,9 +6533,9 @@
                 <a:solidFill>
                   <a:srgbClr val="7A869C"/>
                 </a:solidFill>
-                <a:latin typeface="나눔고딕코딩"/>
-                <a:ea typeface="나눔고딕코딩"/>
-                <a:cs typeface="나눔고딕코딩"/>
+                <a:latin typeface="D2Coding"/>
+                <a:ea typeface="D2Coding"/>
+                <a:cs typeface="D2Coding"/>
               </a:rPr>
               <a:t>1</a:t>
             </a:r>
@@ -6551,9 +6551,9 @@
                 <a:solidFill>
                   <a:srgbClr val="7A869C"/>
                 </a:solidFill>
-                <a:latin typeface="나눔고딕코딩"/>
-                <a:ea typeface="나눔고딕코딩"/>
-                <a:cs typeface="나눔고딕코딩"/>
+                <a:latin typeface="D2Coding"/>
+                <a:ea typeface="D2Coding"/>
+                <a:cs typeface="D2Coding"/>
               </a:rPr>
               <a:t>2</a:t>
             </a:r>
@@ -6569,9 +6569,9 @@
                 <a:solidFill>
                   <a:srgbClr val="7A869C"/>
                 </a:solidFill>
-                <a:latin typeface="나눔고딕코딩"/>
-                <a:ea typeface="나눔고딕코딩"/>
-                <a:cs typeface="나눔고딕코딩"/>
+                <a:latin typeface="D2Coding"/>
+                <a:ea typeface="D2Coding"/>
+                <a:cs typeface="D2Coding"/>
               </a:rPr>
               <a:t>3</a:t>
             </a:r>
@@ -6587,9 +6587,9 @@
                 <a:solidFill>
                   <a:srgbClr val="7A869C"/>
                 </a:solidFill>
-                <a:latin typeface="나눔고딕코딩"/>
-                <a:ea typeface="나눔고딕코딩"/>
-                <a:cs typeface="나눔고딕코딩"/>
+                <a:latin typeface="D2Coding"/>
+                <a:ea typeface="D2Coding"/>
+                <a:cs typeface="D2Coding"/>
               </a:rPr>
               <a:t>4</a:t>
             </a:r>
@@ -6605,9 +6605,9 @@
                 <a:solidFill>
                   <a:srgbClr val="7A869C"/>
                 </a:solidFill>
-                <a:latin typeface="나눔고딕코딩"/>
-                <a:ea typeface="나눔고딕코딩"/>
-                <a:cs typeface="나눔고딕코딩"/>
+                <a:latin typeface="D2Coding"/>
+                <a:ea typeface="D2Coding"/>
+                <a:cs typeface="D2Coding"/>
               </a:rPr>
               <a:t>5</a:t>
             </a:r>
@@ -6623,9 +6623,9 @@
                 <a:solidFill>
                   <a:srgbClr val="7A869C"/>
                 </a:solidFill>
-                <a:latin typeface="나눔고딕코딩"/>
-                <a:ea typeface="나눔고딕코딩"/>
-                <a:cs typeface="나눔고딕코딩"/>
+                <a:latin typeface="D2Coding"/>
+                <a:ea typeface="D2Coding"/>
+                <a:cs typeface="D2Coding"/>
               </a:rPr>
               <a:t>6</a:t>
             </a:r>
@@ -6641,9 +6641,9 @@
                 <a:solidFill>
                   <a:srgbClr val="7A869C"/>
                 </a:solidFill>
-                <a:latin typeface="나눔고딕코딩"/>
-                <a:ea typeface="나눔고딕코딩"/>
-                <a:cs typeface="나눔고딕코딩"/>
+                <a:latin typeface="D2Coding"/>
+                <a:ea typeface="D2Coding"/>
+                <a:cs typeface="D2Coding"/>
               </a:rPr>
               <a:t>7</a:t>
             </a:r>
@@ -6659,9 +6659,9 @@
                 <a:solidFill>
                   <a:srgbClr val="7A869C"/>
                 </a:solidFill>
-                <a:latin typeface="나눔고딕코딩"/>
-                <a:ea typeface="나눔고딕코딩"/>
-                <a:cs typeface="나눔고딕코딩"/>
+                <a:latin typeface="D2Coding"/>
+                <a:ea typeface="D2Coding"/>
+                <a:cs typeface="D2Coding"/>
               </a:rPr>
               <a:t>8</a:t>
             </a:r>
@@ -6677,9 +6677,9 @@
                 <a:solidFill>
                   <a:srgbClr val="7A869C"/>
                 </a:solidFill>
-                <a:latin typeface="나눔고딕코딩"/>
-                <a:ea typeface="나눔고딕코딩"/>
-                <a:cs typeface="나눔고딕코딩"/>
+                <a:latin typeface="D2Coding"/>
+                <a:ea typeface="D2Coding"/>
+                <a:cs typeface="D2Coding"/>
               </a:rPr>
               <a:t>9</a:t>
             </a:r>
@@ -6695,9 +6695,9 @@
                 <a:solidFill>
                   <a:srgbClr val="7A869C"/>
                 </a:solidFill>
-                <a:latin typeface="나눔고딕코딩"/>
-                <a:ea typeface="나눔고딕코딩"/>
-                <a:cs typeface="나눔고딕코딩"/>
+                <a:latin typeface="D2Coding"/>
+                <a:ea typeface="D2Coding"/>
+                <a:cs typeface="D2Coding"/>
               </a:rPr>
               <a:t>10</a:t>
             </a:r>
@@ -6713,9 +6713,9 @@
                 <a:solidFill>
                   <a:srgbClr val="7A869C"/>
                 </a:solidFill>
-                <a:latin typeface="나눔고딕코딩"/>
-                <a:ea typeface="나눔고딕코딩"/>
-                <a:cs typeface="나눔고딕코딩"/>
+                <a:latin typeface="D2Coding"/>
+                <a:ea typeface="D2Coding"/>
+                <a:cs typeface="D2Coding"/>
               </a:rPr>
               <a:t>11</a:t>
             </a:r>
@@ -6731,9 +6731,9 @@
                 <a:solidFill>
                   <a:srgbClr val="7A869C"/>
                 </a:solidFill>
-                <a:latin typeface="나눔고딕코딩"/>
-                <a:ea typeface="나눔고딕코딩"/>
-                <a:cs typeface="나눔고딕코딩"/>
+                <a:latin typeface="D2Coding"/>
+                <a:ea typeface="D2Coding"/>
+                <a:cs typeface="D2Coding"/>
               </a:rPr>
               <a:t>12</a:t>
             </a:r>
@@ -6749,9 +6749,9 @@
                 <a:solidFill>
                   <a:srgbClr val="7A869C"/>
                 </a:solidFill>
-                <a:latin typeface="나눔고딕코딩"/>
-                <a:ea typeface="나눔고딕코딩"/>
-                <a:cs typeface="나눔고딕코딩"/>
+                <a:latin typeface="D2Coding"/>
+                <a:ea typeface="D2Coding"/>
+                <a:cs typeface="D2Coding"/>
               </a:rPr>
               <a:t>13</a:t>
             </a:r>
@@ -6767,9 +6767,9 @@
                 <a:solidFill>
                   <a:srgbClr val="7A869C"/>
                 </a:solidFill>
-                <a:latin typeface="나눔고딕코딩"/>
-                <a:ea typeface="나눔고딕코딩"/>
-                <a:cs typeface="나눔고딕코딩"/>
+                <a:latin typeface="D2Coding"/>
+                <a:ea typeface="D2Coding"/>
+                <a:cs typeface="D2Coding"/>
               </a:rPr>
               <a:t>14</a:t>
             </a:r>
@@ -6785,9 +6785,9 @@
                 <a:solidFill>
                   <a:srgbClr val="7A869C"/>
                 </a:solidFill>
-                <a:latin typeface="나눔고딕코딩"/>
-                <a:ea typeface="나눔고딕코딩"/>
-                <a:cs typeface="나눔고딕코딩"/>
+                <a:latin typeface="D2Coding"/>
+                <a:ea typeface="D2Coding"/>
+                <a:cs typeface="D2Coding"/>
               </a:rPr>
               <a:t>15</a:t>
             </a:r>
@@ -6803,9 +6803,9 @@
                 <a:solidFill>
                   <a:srgbClr val="7A869C"/>
                 </a:solidFill>
-                <a:latin typeface="나눔고딕코딩"/>
-                <a:ea typeface="나눔고딕코딩"/>
-                <a:cs typeface="나눔고딕코딩"/>
+                <a:latin typeface="D2Coding"/>
+                <a:ea typeface="D2Coding"/>
+                <a:cs typeface="D2Coding"/>
               </a:rPr>
               <a:t>16</a:t>
             </a:r>
@@ -6844,9 +6844,9 @@
                 <a:solidFill>
                   <a:srgbClr val="E6EAF2"/>
                 </a:solidFill>
-                <a:latin typeface="나눔고딕코딩"/>
-                <a:ea typeface="나눔고딕코딩"/>
-                <a:cs typeface="나눔고딕코딩"/>
+                <a:latin typeface="D2Coding"/>
+                <a:ea typeface="D2Coding"/>
+                <a:cs typeface="D2Coding"/>
               </a:rPr>
               <a:t>customers(cust_id, name, grade, city, email, joined_date, points)</a:t>
             </a:r>
@@ -6862,9 +6862,9 @@
                 <a:solidFill>
                   <a:srgbClr val="E6EAF2"/>
                 </a:solidFill>
-                <a:latin typeface="나눔고딕코딩"/>
-                <a:ea typeface="나눔고딕코딩"/>
-                <a:cs typeface="나눔고딕코딩"/>
+                <a:latin typeface="D2Coding"/>
+                <a:ea typeface="D2Coding"/>
+                <a:cs typeface="D2Coding"/>
               </a:rPr>
               <a:t>  후보키 : cust_id, email     ← 둘 다 겹치지 않는다</a:t>
             </a:r>
@@ -6880,9 +6880,9 @@
                 <a:solidFill>
                   <a:srgbClr val="E6EAF2"/>
                 </a:solidFill>
-                <a:latin typeface="나눔고딕코딩"/>
-                <a:ea typeface="나눔고딕코딩"/>
-                <a:cs typeface="나눔고딕코딩"/>
+                <a:latin typeface="D2Coding"/>
+                <a:ea typeface="D2Coding"/>
+                <a:cs typeface="D2Coding"/>
               </a:rPr>
               <a:t>  기본키 : cust_id            ← 대표로 선정</a:t>
             </a:r>
@@ -6898,9 +6898,9 @@
                 <a:solidFill>
                   <a:srgbClr val="E6EAF2"/>
                 </a:solidFill>
-                <a:latin typeface="나눔고딕코딩"/>
-                <a:ea typeface="나눔고딕코딩"/>
-                <a:cs typeface="나눔고딕코딩"/>
+                <a:latin typeface="D2Coding"/>
+                <a:ea typeface="D2Coding"/>
+                <a:cs typeface="D2Coding"/>
               </a:rPr>
               <a:t>  대체키 : email              ← 선정되지 못한 후보키</a:t>
             </a:r>
@@ -6916,9 +6916,9 @@
                 <a:solidFill>
                   <a:srgbClr val="E6EAF2"/>
                 </a:solidFill>
-                <a:latin typeface="나눔고딕코딩"/>
-                <a:ea typeface="나눔고딕코딩"/>
-                <a:cs typeface="나눔고딕코딩"/>
+                <a:latin typeface="D2Coding"/>
+                <a:ea typeface="D2Coding"/>
+                <a:cs typeface="D2Coding"/>
               </a:rPr>
               <a:t/>
             </a:r>
@@ -6934,9 +6934,9 @@
                 <a:solidFill>
                   <a:srgbClr val="E6EAF2"/>
                 </a:solidFill>
-                <a:latin typeface="나눔고딕코딩"/>
-                <a:ea typeface="나눔고딕코딩"/>
-                <a:cs typeface="나눔고딕코딩"/>
+                <a:latin typeface="D2Coding"/>
+                <a:ea typeface="D2Coding"/>
+                <a:cs typeface="D2Coding"/>
               </a:rPr>
               <a:t>order_items(order_id, prod_id, qty, unit_price)</a:t>
             </a:r>
@@ -6952,9 +6952,9 @@
                 <a:solidFill>
                   <a:srgbClr val="E6EAF2"/>
                 </a:solidFill>
-                <a:latin typeface="나눔고딕코딩"/>
-                <a:ea typeface="나눔고딕코딩"/>
-                <a:cs typeface="나눔고딕코딩"/>
+                <a:latin typeface="D2Coding"/>
+                <a:ea typeface="D2Coding"/>
+                <a:cs typeface="D2Coding"/>
               </a:rPr>
               <a:t>  · order_id만으로는 부족 (주문 1001에 상품이 2개 담김)</a:t>
             </a:r>
@@ -6970,9 +6970,9 @@
                 <a:solidFill>
                   <a:srgbClr val="E6EAF2"/>
                 </a:solidFill>
-                <a:latin typeface="나눔고딕코딩"/>
-                <a:ea typeface="나눔고딕코딩"/>
-                <a:cs typeface="나눔고딕코딩"/>
+                <a:latin typeface="D2Coding"/>
+                <a:ea typeface="D2Coding"/>
+                <a:cs typeface="D2Coding"/>
               </a:rPr>
               <a:t>  · prod_id만으로도 부족 (P003이 여러 주문에 등장)</a:t>
             </a:r>
@@ -6988,9 +6988,9 @@
                 <a:solidFill>
                   <a:srgbClr val="E6EAF2"/>
                 </a:solidFill>
-                <a:latin typeface="나눔고딕코딩"/>
-                <a:ea typeface="나눔고딕코딩"/>
-                <a:cs typeface="나눔고딕코딩"/>
+                <a:latin typeface="D2Coding"/>
+                <a:ea typeface="D2Coding"/>
+                <a:cs typeface="D2Coding"/>
               </a:rPr>
               <a:t>  → (order_id, prod_id) 둘을 묶어야 식별 = 복합키(Composite Key)</a:t>
             </a:r>
@@ -7006,9 +7006,9 @@
                 <a:solidFill>
                   <a:srgbClr val="E6EAF2"/>
                 </a:solidFill>
-                <a:latin typeface="나눔고딕코딩"/>
-                <a:ea typeface="나눔고딕코딩"/>
-                <a:cs typeface="나눔고딕코딩"/>
+                <a:latin typeface="D2Coding"/>
+                <a:ea typeface="D2Coding"/>
+                <a:cs typeface="D2Coding"/>
               </a:rPr>
               <a:t/>
             </a:r>
@@ -7024,9 +7024,9 @@
                 <a:solidFill>
                   <a:srgbClr val="E6EAF2"/>
                 </a:solidFill>
-                <a:latin typeface="나눔고딕코딩"/>
-                <a:ea typeface="나눔고딕코딩"/>
-                <a:cs typeface="나눔고딕코딩"/>
+                <a:latin typeface="D2Coding"/>
+                <a:ea typeface="D2Coding"/>
+                <a:cs typeface="D2Coding"/>
               </a:rPr>
               <a:t>orders(order_id, cust_id, emp_id, ...)</a:t>
             </a:r>
@@ -7042,9 +7042,9 @@
                 <a:solidFill>
                   <a:srgbClr val="E6EAF2"/>
                 </a:solidFill>
-                <a:latin typeface="나눔고딕코딩"/>
-                <a:ea typeface="나눔고딕코딩"/>
-                <a:cs typeface="나눔고딕코딩"/>
+                <a:latin typeface="D2Coding"/>
+                <a:ea typeface="D2Coding"/>
+                <a:cs typeface="D2Coding"/>
               </a:rPr>
               <a:t>  · cust_id → customers 참조 = 외래키</a:t>
             </a:r>
@@ -7060,9 +7060,9 @@
                 <a:solidFill>
                   <a:srgbClr val="E6EAF2"/>
                 </a:solidFill>
-                <a:latin typeface="나눔고딕코딩"/>
-                <a:ea typeface="나눔고딕코딩"/>
-                <a:cs typeface="나눔고딕코딩"/>
+                <a:latin typeface="D2Coding"/>
+                <a:ea typeface="D2Coding"/>
+                <a:cs typeface="D2Coding"/>
               </a:rPr>
               <a:t>  · emp_id  → employees 참조 = 외래키 (온라인 주문은 NULL)</a:t>
             </a:r>
@@ -7078,9 +7078,9 @@
                 <a:solidFill>
                   <a:srgbClr val="E6EAF2"/>
                 </a:solidFill>
-                <a:latin typeface="나눔고딕코딩"/>
-                <a:ea typeface="나눔고딕코딩"/>
-                <a:cs typeface="나눔고딕코딩"/>
+                <a:latin typeface="D2Coding"/>
+                <a:ea typeface="D2Coding"/>
+                <a:cs typeface="D2Coding"/>
               </a:rPr>
               <a:t/>
             </a:r>
@@ -7096,9 +7096,9 @@
                 <a:solidFill>
                   <a:srgbClr val="E6EAF2"/>
                 </a:solidFill>
-                <a:latin typeface="나눔고딕코딩"/>
-                <a:ea typeface="나눔고딕코딩"/>
-                <a:cs typeface="나눔고딕코딩"/>
+                <a:latin typeface="D2Coding"/>
+                <a:ea typeface="D2Coding"/>
+                <a:cs typeface="D2Coding"/>
               </a:rPr>
               <a:t>employees(emp_id, ..., manager_id)</a:t>
             </a:r>
@@ -7114,9 +7114,9 @@
                 <a:solidFill>
                   <a:srgbClr val="E6EAF2"/>
                 </a:solidFill>
-                <a:latin typeface="나눔고딕코딩"/>
-                <a:ea typeface="나눔고딕코딩"/>
-                <a:cs typeface="나눔고딕코딩"/>
+                <a:latin typeface="D2Coding"/>
+                <a:ea typeface="D2Coding"/>
+                <a:cs typeface="D2Coding"/>
               </a:rPr>
               <a:t>  · manager_id → employees.emp_id = 자기 테이블을 참조하는 외래키</a:t>
             </a:r>
@@ -9690,9 +9690,9 @@
                 <a:solidFill>
                   <a:srgbClr val="7A869C"/>
                 </a:solidFill>
-                <a:latin typeface="나눔고딕코딩"/>
-                <a:ea typeface="나눔고딕코딩"/>
-                <a:cs typeface="나눔고딕코딩"/>
+                <a:latin typeface="D2Coding"/>
+                <a:ea typeface="D2Coding"/>
+                <a:cs typeface="D2Coding"/>
               </a:rPr>
               <a:t>1</a:t>
             </a:r>
@@ -9708,9 +9708,9 @@
                 <a:solidFill>
                   <a:srgbClr val="7A869C"/>
                 </a:solidFill>
-                <a:latin typeface="나눔고딕코딩"/>
-                <a:ea typeface="나눔고딕코딩"/>
-                <a:cs typeface="나눔고딕코딩"/>
+                <a:latin typeface="D2Coding"/>
+                <a:ea typeface="D2Coding"/>
+                <a:cs typeface="D2Coding"/>
               </a:rPr>
               <a:t>2</a:t>
             </a:r>
@@ -9726,9 +9726,9 @@
                 <a:solidFill>
                   <a:srgbClr val="7A869C"/>
                 </a:solidFill>
-                <a:latin typeface="나눔고딕코딩"/>
-                <a:ea typeface="나눔고딕코딩"/>
-                <a:cs typeface="나눔고딕코딩"/>
+                <a:latin typeface="D2Coding"/>
+                <a:ea typeface="D2Coding"/>
+                <a:cs typeface="D2Coding"/>
               </a:rPr>
               <a:t>3</a:t>
             </a:r>
@@ -9744,9 +9744,9 @@
                 <a:solidFill>
                   <a:srgbClr val="7A869C"/>
                 </a:solidFill>
-                <a:latin typeface="나눔고딕코딩"/>
-                <a:ea typeface="나눔고딕코딩"/>
-                <a:cs typeface="나눔고딕코딩"/>
+                <a:latin typeface="D2Coding"/>
+                <a:ea typeface="D2Coding"/>
+                <a:cs typeface="D2Coding"/>
               </a:rPr>
               <a:t>4</a:t>
             </a:r>
@@ -9762,9 +9762,9 @@
                 <a:solidFill>
                   <a:srgbClr val="7A869C"/>
                 </a:solidFill>
-                <a:latin typeface="나눔고딕코딩"/>
-                <a:ea typeface="나눔고딕코딩"/>
-                <a:cs typeface="나눔고딕코딩"/>
+                <a:latin typeface="D2Coding"/>
+                <a:ea typeface="D2Coding"/>
+                <a:cs typeface="D2Coding"/>
               </a:rPr>
               <a:t>5</a:t>
             </a:r>
@@ -9780,9 +9780,9 @@
                 <a:solidFill>
                   <a:srgbClr val="7A869C"/>
                 </a:solidFill>
-                <a:latin typeface="나눔고딕코딩"/>
-                <a:ea typeface="나눔고딕코딩"/>
-                <a:cs typeface="나눔고딕코딩"/>
+                <a:latin typeface="D2Coding"/>
+                <a:ea typeface="D2Coding"/>
+                <a:cs typeface="D2Coding"/>
               </a:rPr>
               <a:t>6</a:t>
             </a:r>
@@ -9798,9 +9798,9 @@
                 <a:solidFill>
                   <a:srgbClr val="7A869C"/>
                 </a:solidFill>
-                <a:latin typeface="나눔고딕코딩"/>
-                <a:ea typeface="나눔고딕코딩"/>
-                <a:cs typeface="나눔고딕코딩"/>
+                <a:latin typeface="D2Coding"/>
+                <a:ea typeface="D2Coding"/>
+                <a:cs typeface="D2Coding"/>
               </a:rPr>
               <a:t>7</a:t>
             </a:r>
@@ -9816,9 +9816,9 @@
                 <a:solidFill>
                   <a:srgbClr val="7A869C"/>
                 </a:solidFill>
-                <a:latin typeface="나눔고딕코딩"/>
-                <a:ea typeface="나눔고딕코딩"/>
-                <a:cs typeface="나눔고딕코딩"/>
+                <a:latin typeface="D2Coding"/>
+                <a:ea typeface="D2Coding"/>
+                <a:cs typeface="D2Coding"/>
               </a:rPr>
               <a:t>8</a:t>
             </a:r>
@@ -9857,9 +9857,9 @@
                 <a:solidFill>
                   <a:srgbClr val="E6EAF2"/>
                 </a:solidFill>
-                <a:latin typeface="나눔고딕코딩"/>
-                <a:ea typeface="나눔고딕코딩"/>
-                <a:cs typeface="나눔고딕코딩"/>
+                <a:latin typeface="D2Coding"/>
+                <a:ea typeface="D2Coding"/>
+                <a:cs typeface="D2Coding"/>
               </a:rPr>
               <a:t>-- 존재하지 않는 고객 C999의 주문을 넣으려 하면</a:t>
             </a:r>
@@ -9875,9 +9875,9 @@
                 <a:solidFill>
                   <a:srgbClr val="E6EAF2"/>
                 </a:solidFill>
-                <a:latin typeface="나눔고딕코딩"/>
-                <a:ea typeface="나눔고딕코딩"/>
-                <a:cs typeface="나눔고딕코딩"/>
+                <a:latin typeface="D2Coding"/>
+                <a:ea typeface="D2Coding"/>
+                <a:cs typeface="D2Coding"/>
               </a:rPr>
               <a:t>INSERT INTO orders (cust_id, emp_id, order_date, status)</a:t>
             </a:r>
@@ -9893,9 +9893,9 @@
                 <a:solidFill>
                   <a:srgbClr val="E6EAF2"/>
                 </a:solidFill>
-                <a:latin typeface="나눔고딕코딩"/>
-                <a:ea typeface="나눔고딕코딩"/>
-                <a:cs typeface="나눔고딕코딩"/>
+                <a:latin typeface="D2Coding"/>
+                <a:ea typeface="D2Coding"/>
+                <a:cs typeface="D2Coding"/>
               </a:rPr>
               <a:t>VALUES ('C999', 'E002', '2026-07-01', '주문접수');</a:t>
             </a:r>
@@ -9911,9 +9911,9 @@
                 <a:solidFill>
                   <a:srgbClr val="E6EAF2"/>
                 </a:solidFill>
-                <a:latin typeface="나눔고딕코딩"/>
-                <a:ea typeface="나눔고딕코딩"/>
-                <a:cs typeface="나눔고딕코딩"/>
+                <a:latin typeface="D2Coding"/>
+                <a:ea typeface="D2Coding"/>
+                <a:cs typeface="D2Coding"/>
               </a:rPr>
               <a:t>-- → 오류! customers에 C999가 없으므로 DBMS가 거부한다.</a:t>
             </a:r>
@@ -9929,9 +9929,9 @@
                 <a:solidFill>
                   <a:srgbClr val="E6EAF2"/>
                 </a:solidFill>
-                <a:latin typeface="나눔고딕코딩"/>
-                <a:ea typeface="나눔고딕코딩"/>
-                <a:cs typeface="나눔고딕코딩"/>
+                <a:latin typeface="D2Coding"/>
+                <a:ea typeface="D2Coding"/>
+                <a:cs typeface="D2Coding"/>
               </a:rPr>
               <a:t/>
             </a:r>
@@ -9947,9 +9947,9 @@
                 <a:solidFill>
                   <a:srgbClr val="E6EAF2"/>
                 </a:solidFill>
-                <a:latin typeface="나눔고딕코딩"/>
-                <a:ea typeface="나눔고딕코딩"/>
-                <a:cs typeface="나눔고딕코딩"/>
+                <a:latin typeface="D2Coding"/>
+                <a:ea typeface="D2Coding"/>
+                <a:cs typeface="D2Coding"/>
               </a:rPr>
               <a:t>-- 주문이 3건 있는 고객 C001을 지우려 하면</a:t>
             </a:r>
@@ -9965,9 +9965,9 @@
                 <a:solidFill>
                   <a:srgbClr val="E6EAF2"/>
                 </a:solidFill>
-                <a:latin typeface="나눔고딕코딩"/>
-                <a:ea typeface="나눔고딕코딩"/>
-                <a:cs typeface="나눔고딕코딩"/>
+                <a:latin typeface="D2Coding"/>
+                <a:ea typeface="D2Coding"/>
+                <a:cs typeface="D2Coding"/>
               </a:rPr>
               <a:t>DELETE FROM customers WHERE cust_id = 'C001';</a:t>
             </a:r>
@@ -9983,9 +9983,9 @@
                 <a:solidFill>
                   <a:srgbClr val="E6EAF2"/>
                 </a:solidFill>
-                <a:latin typeface="나눔고딕코딩"/>
-                <a:ea typeface="나눔고딕코딩"/>
-                <a:cs typeface="나눔고딕코딩"/>
+                <a:latin typeface="D2Coding"/>
+                <a:ea typeface="D2Coding"/>
+                <a:cs typeface="D2Coding"/>
               </a:rPr>
               <a:t>-- → 오류! orders가 C001을 참조 중이므로 기본 설정에서는 거부된다.</a:t>
             </a:r>
@@ -14455,9 +14455,9 @@
                 <a:solidFill>
                   <a:srgbClr val="7A869C"/>
                 </a:solidFill>
-                <a:latin typeface="나눔고딕코딩"/>
-                <a:ea typeface="나눔고딕코딩"/>
-                <a:cs typeface="나눔고딕코딩"/>
+                <a:latin typeface="D2Coding"/>
+                <a:ea typeface="D2Coding"/>
+                <a:cs typeface="D2Coding"/>
               </a:rPr>
               <a:t>1</a:t>
             </a:r>
@@ -14473,9 +14473,9 @@
                 <a:solidFill>
                   <a:srgbClr val="7A869C"/>
                 </a:solidFill>
-                <a:latin typeface="나눔고딕코딩"/>
-                <a:ea typeface="나눔고딕코딩"/>
-                <a:cs typeface="나눔고딕코딩"/>
+                <a:latin typeface="D2Coding"/>
+                <a:ea typeface="D2Coding"/>
+                <a:cs typeface="D2Coding"/>
               </a:rPr>
               <a:t>2</a:t>
             </a:r>
@@ -14491,9 +14491,9 @@
                 <a:solidFill>
                   <a:srgbClr val="7A869C"/>
                 </a:solidFill>
-                <a:latin typeface="나눔고딕코딩"/>
-                <a:ea typeface="나눔고딕코딩"/>
-                <a:cs typeface="나눔고딕코딩"/>
+                <a:latin typeface="D2Coding"/>
+                <a:ea typeface="D2Coding"/>
+                <a:cs typeface="D2Coding"/>
               </a:rPr>
               <a:t>3</a:t>
             </a:r>
@@ -14509,9 +14509,9 @@
                 <a:solidFill>
                   <a:srgbClr val="7A869C"/>
                 </a:solidFill>
-                <a:latin typeface="나눔고딕코딩"/>
-                <a:ea typeface="나눔고딕코딩"/>
-                <a:cs typeface="나눔고딕코딩"/>
+                <a:latin typeface="D2Coding"/>
+                <a:ea typeface="D2Coding"/>
+                <a:cs typeface="D2Coding"/>
               </a:rPr>
               <a:t>4</a:t>
             </a:r>
@@ -14527,9 +14527,9 @@
                 <a:solidFill>
                   <a:srgbClr val="7A869C"/>
                 </a:solidFill>
-                <a:latin typeface="나눔고딕코딩"/>
-                <a:ea typeface="나눔고딕코딩"/>
-                <a:cs typeface="나눔고딕코딩"/>
+                <a:latin typeface="D2Coding"/>
+                <a:ea typeface="D2Coding"/>
+                <a:cs typeface="D2Coding"/>
               </a:rPr>
               <a:t>5</a:t>
             </a:r>
@@ -14545,9 +14545,9 @@
                 <a:solidFill>
                   <a:srgbClr val="7A869C"/>
                 </a:solidFill>
-                <a:latin typeface="나눔고딕코딩"/>
-                <a:ea typeface="나눔고딕코딩"/>
-                <a:cs typeface="나눔고딕코딩"/>
+                <a:latin typeface="D2Coding"/>
+                <a:ea typeface="D2Coding"/>
+                <a:cs typeface="D2Coding"/>
               </a:rPr>
               <a:t>6</a:t>
             </a:r>
@@ -14563,9 +14563,9 @@
                 <a:solidFill>
                   <a:srgbClr val="7A869C"/>
                 </a:solidFill>
-                <a:latin typeface="나눔고딕코딩"/>
-                <a:ea typeface="나눔고딕코딩"/>
-                <a:cs typeface="나눔고딕코딩"/>
+                <a:latin typeface="D2Coding"/>
+                <a:ea typeface="D2Coding"/>
+                <a:cs typeface="D2Coding"/>
               </a:rPr>
               <a:t>7</a:t>
             </a:r>
@@ -14581,9 +14581,9 @@
                 <a:solidFill>
                   <a:srgbClr val="7A869C"/>
                 </a:solidFill>
-                <a:latin typeface="나눔고딕코딩"/>
-                <a:ea typeface="나눔고딕코딩"/>
-                <a:cs typeface="나눔고딕코딩"/>
+                <a:latin typeface="D2Coding"/>
+                <a:ea typeface="D2Coding"/>
+                <a:cs typeface="D2Coding"/>
               </a:rPr>
               <a:t>8</a:t>
             </a:r>
@@ -14599,9 +14599,9 @@
                 <a:solidFill>
                   <a:srgbClr val="7A869C"/>
                 </a:solidFill>
-                <a:latin typeface="나눔고딕코딩"/>
-                <a:ea typeface="나눔고딕코딩"/>
-                <a:cs typeface="나눔고딕코딩"/>
+                <a:latin typeface="D2Coding"/>
+                <a:ea typeface="D2Coding"/>
+                <a:cs typeface="D2Coding"/>
               </a:rPr>
               <a:t>9</a:t>
             </a:r>
@@ -14617,9 +14617,9 @@
                 <a:solidFill>
                   <a:srgbClr val="7A869C"/>
                 </a:solidFill>
-                <a:latin typeface="나눔고딕코딩"/>
-                <a:ea typeface="나눔고딕코딩"/>
-                <a:cs typeface="나눔고딕코딩"/>
+                <a:latin typeface="D2Coding"/>
+                <a:ea typeface="D2Coding"/>
+                <a:cs typeface="D2Coding"/>
               </a:rPr>
               <a:t>10</a:t>
             </a:r>
@@ -14635,9 +14635,9 @@
                 <a:solidFill>
                   <a:srgbClr val="7A869C"/>
                 </a:solidFill>
-                <a:latin typeface="나눔고딕코딩"/>
-                <a:ea typeface="나눔고딕코딩"/>
-                <a:cs typeface="나눔고딕코딩"/>
+                <a:latin typeface="D2Coding"/>
+                <a:ea typeface="D2Coding"/>
+                <a:cs typeface="D2Coding"/>
               </a:rPr>
               <a:t>11</a:t>
             </a:r>
@@ -14653,9 +14653,9 @@
                 <a:solidFill>
                   <a:srgbClr val="7A869C"/>
                 </a:solidFill>
-                <a:latin typeface="나눔고딕코딩"/>
-                <a:ea typeface="나눔고딕코딩"/>
-                <a:cs typeface="나눔고딕코딩"/>
+                <a:latin typeface="D2Coding"/>
+                <a:ea typeface="D2Coding"/>
+                <a:cs typeface="D2Coding"/>
               </a:rPr>
               <a:t>12</a:t>
             </a:r>
@@ -14671,9 +14671,9 @@
                 <a:solidFill>
                   <a:srgbClr val="7A869C"/>
                 </a:solidFill>
-                <a:latin typeface="나눔고딕코딩"/>
-                <a:ea typeface="나눔고딕코딩"/>
-                <a:cs typeface="나눔고딕코딩"/>
+                <a:latin typeface="D2Coding"/>
+                <a:ea typeface="D2Coding"/>
+                <a:cs typeface="D2Coding"/>
               </a:rPr>
               <a:t>13</a:t>
             </a:r>
@@ -14689,9 +14689,9 @@
                 <a:solidFill>
                   <a:srgbClr val="7A869C"/>
                 </a:solidFill>
-                <a:latin typeface="나눔고딕코딩"/>
-                <a:ea typeface="나눔고딕코딩"/>
-                <a:cs typeface="나눔고딕코딩"/>
+                <a:latin typeface="D2Coding"/>
+                <a:ea typeface="D2Coding"/>
+                <a:cs typeface="D2Coding"/>
               </a:rPr>
               <a:t>14</a:t>
             </a:r>
@@ -14707,9 +14707,9 @@
                 <a:solidFill>
                   <a:srgbClr val="7A869C"/>
                 </a:solidFill>
-                <a:latin typeface="나눔고딕코딩"/>
-                <a:ea typeface="나눔고딕코딩"/>
-                <a:cs typeface="나눔고딕코딩"/>
+                <a:latin typeface="D2Coding"/>
+                <a:ea typeface="D2Coding"/>
+                <a:cs typeface="D2Coding"/>
               </a:rPr>
               <a:t>15</a:t>
             </a:r>
@@ -26757,9 +26757,9 @@
                 <a:solidFill>
                   <a:srgbClr val="7A869C"/>
                 </a:solidFill>
-                <a:latin typeface="나눔고딕코딩"/>
-                <a:ea typeface="나눔고딕코딩"/>
-                <a:cs typeface="나눔고딕코딩"/>
+                <a:latin typeface="D2Coding"/>
+                <a:ea typeface="D2Coding"/>
+                <a:cs typeface="D2Coding"/>
               </a:rPr>
               <a:t>1</a:t>
             </a:r>
@@ -26775,9 +26775,9 @@
                 <a:solidFill>
                   <a:srgbClr val="7A869C"/>
                 </a:solidFill>
-                <a:latin typeface="나눔고딕코딩"/>
-                <a:ea typeface="나눔고딕코딩"/>
-                <a:cs typeface="나눔고딕코딩"/>
+                <a:latin typeface="D2Coding"/>
+                <a:ea typeface="D2Coding"/>
+                <a:cs typeface="D2Coding"/>
               </a:rPr>
               <a:t>2</a:t>
             </a:r>
@@ -26793,9 +26793,9 @@
                 <a:solidFill>
                   <a:srgbClr val="7A869C"/>
                 </a:solidFill>
-                <a:latin typeface="나눔고딕코딩"/>
-                <a:ea typeface="나눔고딕코딩"/>
-                <a:cs typeface="나눔고딕코딩"/>
+                <a:latin typeface="D2Coding"/>
+                <a:ea typeface="D2Coding"/>
+                <a:cs typeface="D2Coding"/>
               </a:rPr>
               <a:t>3</a:t>
             </a:r>
@@ -26811,9 +26811,9 @@
                 <a:solidFill>
                   <a:srgbClr val="7A869C"/>
                 </a:solidFill>
-                <a:latin typeface="나눔고딕코딩"/>
-                <a:ea typeface="나눔고딕코딩"/>
-                <a:cs typeface="나눔고딕코딩"/>
+                <a:latin typeface="D2Coding"/>
+                <a:ea typeface="D2Coding"/>
+                <a:cs typeface="D2Coding"/>
               </a:rPr>
               <a:t>4</a:t>
             </a:r>
@@ -26829,9 +26829,9 @@
                 <a:solidFill>
                   <a:srgbClr val="7A869C"/>
                 </a:solidFill>
-                <a:latin typeface="나눔고딕코딩"/>
-                <a:ea typeface="나눔고딕코딩"/>
-                <a:cs typeface="나눔고딕코딩"/>
+                <a:latin typeface="D2Coding"/>
+                <a:ea typeface="D2Coding"/>
+                <a:cs typeface="D2Coding"/>
               </a:rPr>
               <a:t>5</a:t>
             </a:r>
@@ -26847,9 +26847,9 @@
                 <a:solidFill>
                   <a:srgbClr val="7A869C"/>
                 </a:solidFill>
-                <a:latin typeface="나눔고딕코딩"/>
-                <a:ea typeface="나눔고딕코딩"/>
-                <a:cs typeface="나눔고딕코딩"/>
+                <a:latin typeface="D2Coding"/>
+                <a:ea typeface="D2Coding"/>
+                <a:cs typeface="D2Coding"/>
               </a:rPr>
               <a:t>6</a:t>
             </a:r>
@@ -26865,9 +26865,9 @@
                 <a:solidFill>
                   <a:srgbClr val="7A869C"/>
                 </a:solidFill>
-                <a:latin typeface="나눔고딕코딩"/>
-                <a:ea typeface="나눔고딕코딩"/>
-                <a:cs typeface="나눔고딕코딩"/>
+                <a:latin typeface="D2Coding"/>
+                <a:ea typeface="D2Coding"/>
+                <a:cs typeface="D2Coding"/>
               </a:rPr>
               <a:t>7</a:t>
             </a:r>
@@ -26883,9 +26883,9 @@
                 <a:solidFill>
                   <a:srgbClr val="7A869C"/>
                 </a:solidFill>
-                <a:latin typeface="나눔고딕코딩"/>
-                <a:ea typeface="나눔고딕코딩"/>
-                <a:cs typeface="나눔고딕코딩"/>
+                <a:latin typeface="D2Coding"/>
+                <a:ea typeface="D2Coding"/>
+                <a:cs typeface="D2Coding"/>
               </a:rPr>
               <a:t>8</a:t>
             </a:r>
@@ -26901,9 +26901,9 @@
                 <a:solidFill>
                   <a:srgbClr val="7A869C"/>
                 </a:solidFill>
-                <a:latin typeface="나눔고딕코딩"/>
-                <a:ea typeface="나눔고딕코딩"/>
-                <a:cs typeface="나눔고딕코딩"/>
+                <a:latin typeface="D2Coding"/>
+                <a:ea typeface="D2Coding"/>
+                <a:cs typeface="D2Coding"/>
               </a:rPr>
               <a:t>9</a:t>
             </a:r>
@@ -26919,9 +26919,9 @@
                 <a:solidFill>
                   <a:srgbClr val="7A869C"/>
                 </a:solidFill>
-                <a:latin typeface="나눔고딕코딩"/>
-                <a:ea typeface="나눔고딕코딩"/>
-                <a:cs typeface="나눔고딕코딩"/>
+                <a:latin typeface="D2Coding"/>
+                <a:ea typeface="D2Coding"/>
+                <a:cs typeface="D2Coding"/>
               </a:rPr>
               <a:t>10</a:t>
             </a:r>
@@ -26937,9 +26937,9 @@
                 <a:solidFill>
                   <a:srgbClr val="7A869C"/>
                 </a:solidFill>
-                <a:latin typeface="나눔고딕코딩"/>
-                <a:ea typeface="나눔고딕코딩"/>
-                <a:cs typeface="나눔고딕코딩"/>
+                <a:latin typeface="D2Coding"/>
+                <a:ea typeface="D2Coding"/>
+                <a:cs typeface="D2Coding"/>
               </a:rPr>
               <a:t>11</a:t>
             </a:r>
@@ -26955,9 +26955,9 @@
                 <a:solidFill>
                   <a:srgbClr val="7A869C"/>
                 </a:solidFill>
-                <a:latin typeface="나눔고딕코딩"/>
-                <a:ea typeface="나눔고딕코딩"/>
-                <a:cs typeface="나눔고딕코딩"/>
+                <a:latin typeface="D2Coding"/>
+                <a:ea typeface="D2Coding"/>
+                <a:cs typeface="D2Coding"/>
               </a:rPr>
               <a:t>12</a:t>
             </a:r>
@@ -26996,9 +26996,9 @@
                 <a:solidFill>
                   <a:srgbClr val="E6EAF2"/>
                 </a:solidFill>
-                <a:latin typeface="나눔고딕코딩"/>
-                <a:ea typeface="나눔고딕코딩"/>
-                <a:cs typeface="나눔고딕코딩"/>
+                <a:latin typeface="D2Coding"/>
+                <a:ea typeface="D2Coding"/>
+                <a:cs typeface="D2Coding"/>
               </a:rPr>
               <a:t>products                                    ← 릴레이션(테이블)</a:t>
             </a:r>
@@ -27014,9 +27014,9 @@
                 <a:solidFill>
                   <a:srgbClr val="E6EAF2"/>
                 </a:solidFill>
-                <a:latin typeface="나눔고딕코딩"/>
-                <a:ea typeface="나눔고딕코딩"/>
-                <a:cs typeface="나눔고딕코딩"/>
+                <a:latin typeface="D2Coding"/>
+                <a:ea typeface="D2Coding"/>
+                <a:cs typeface="D2Coding"/>
               </a:rPr>
               <a:t>+---------+------------------+----------+--------+-------+</a:t>
             </a:r>
@@ -27032,9 +27032,9 @@
                 <a:solidFill>
                   <a:srgbClr val="E6EAF2"/>
                 </a:solidFill>
-                <a:latin typeface="나눔고딕코딩"/>
-                <a:ea typeface="나눔고딕코딩"/>
-                <a:cs typeface="나눔고딕코딩"/>
+                <a:latin typeface="D2Coding"/>
+                <a:ea typeface="D2Coding"/>
+                <a:cs typeface="D2Coding"/>
               </a:rPr>
               <a:t>| prod_id | name             | category | price  | stock |   ← 속성(열) 5개 = 차수 5</a:t>
             </a:r>
@@ -27050,9 +27050,9 @@
                 <a:solidFill>
                   <a:srgbClr val="E6EAF2"/>
                 </a:solidFill>
-                <a:latin typeface="나눔고딕코딩"/>
-                <a:ea typeface="나눔고딕코딩"/>
-                <a:cs typeface="나눔고딕코딩"/>
+                <a:latin typeface="D2Coding"/>
+                <a:ea typeface="D2Coding"/>
+                <a:cs typeface="D2Coding"/>
               </a:rPr>
               <a:t>+---------+------------------+----------+--------+-------+</a:t>
             </a:r>
@@ -27068,9 +27068,9 @@
                 <a:solidFill>
                   <a:srgbClr val="E6EAF2"/>
                 </a:solidFill>
-                <a:latin typeface="나눔고딕코딩"/>
-                <a:ea typeface="나눔고딕코딩"/>
-                <a:cs typeface="나눔고딕코딩"/>
+                <a:latin typeface="D2Coding"/>
+                <a:ea typeface="D2Coding"/>
+                <a:cs typeface="D2Coding"/>
               </a:rPr>
               <a:t>| P001    | 무선 전기포트    | 가전     |  42000 |    25 |   ← 튜플(행) 하나 = 상품 1종</a:t>
             </a:r>
@@ -27086,9 +27086,9 @@
                 <a:solidFill>
                   <a:srgbClr val="E6EAF2"/>
                 </a:solidFill>
-                <a:latin typeface="나눔고딕코딩"/>
-                <a:ea typeface="나눔고딕코딩"/>
-                <a:cs typeface="나눔고딕코딩"/>
+                <a:latin typeface="D2Coding"/>
+                <a:ea typeface="D2Coding"/>
+                <a:cs typeface="D2Coding"/>
               </a:rPr>
               <a:t>| P004    | 제주 감귤 3kg    | 식품     |  24000 |     0 |</a:t>
             </a:r>
@@ -27104,9 +27104,9 @@
                 <a:solidFill>
                   <a:srgbClr val="E6EAF2"/>
                 </a:solidFill>
-                <a:latin typeface="나눔고딕코딩"/>
-                <a:ea typeface="나눔고딕코딩"/>
-                <a:cs typeface="나눔고딕코딩"/>
+                <a:latin typeface="D2Coding"/>
+                <a:ea typeface="D2Coding"/>
+                <a:cs typeface="D2Coding"/>
               </a:rPr>
               <a:t>| P010    | A5 스프링 노트   | 문구     |   3200 |   180 |</a:t>
             </a:r>
@@ -27122,9 +27122,9 @@
                 <a:solidFill>
                   <a:srgbClr val="E6EAF2"/>
                 </a:solidFill>
-                <a:latin typeface="나눔고딕코딩"/>
-                <a:ea typeface="나눔고딕코딩"/>
-                <a:cs typeface="나눔고딕코딩"/>
+                <a:latin typeface="D2Coding"/>
+                <a:ea typeface="D2Coding"/>
+                <a:cs typeface="D2Coding"/>
               </a:rPr>
               <a:t>+---------+------------------+----------+--------+-------+</a:t>
             </a:r>
@@ -27140,9 +27140,9 @@
                 <a:solidFill>
                   <a:srgbClr val="E6EAF2"/>
                 </a:solidFill>
-                <a:latin typeface="나눔고딕코딩"/>
-                <a:ea typeface="나눔고딕코딩"/>
-                <a:cs typeface="나눔고딕코딩"/>
+                <a:latin typeface="D2Coding"/>
+                <a:ea typeface="D2Coding"/>
+                <a:cs typeface="D2Coding"/>
               </a:rPr>
               <a:t>(전체 상품 10종 → 카디널리티 10)</a:t>
             </a:r>
@@ -27158,9 +27158,9 @@
                 <a:solidFill>
                   <a:srgbClr val="E6EAF2"/>
                 </a:solidFill>
-                <a:latin typeface="나눔고딕코딩"/>
-                <a:ea typeface="나눔고딕코딩"/>
-                <a:cs typeface="나눔고딕코딩"/>
+                <a:latin typeface="D2Coding"/>
+                <a:ea typeface="D2Coding"/>
+                <a:cs typeface="D2Coding"/>
               </a:rPr>
               <a:t/>
             </a:r>
@@ -27176,9 +27176,9 @@
                 <a:solidFill>
                   <a:srgbClr val="E6EAF2"/>
                 </a:solidFill>
-                <a:latin typeface="나눔고딕코딩"/>
-                <a:ea typeface="나눔고딕코딩"/>
-                <a:cs typeface="나눔고딕코딩"/>
+                <a:latin typeface="D2Coding"/>
+                <a:ea typeface="D2Coding"/>
+                <a:cs typeface="D2Coding"/>
               </a:rPr>
               <a:t>도메인(category) = { '가전', '식품', '생활용품', '문구' }</a:t>
             </a:r>
@@ -27194,9 +27194,9 @@
                 <a:solidFill>
                   <a:srgbClr val="E6EAF2"/>
                 </a:solidFill>
-                <a:latin typeface="나눔고딕코딩"/>
-                <a:ea typeface="나눔고딕코딩"/>
-                <a:cs typeface="나눔고딕코딩"/>
+                <a:latin typeface="D2Coding"/>
+                <a:ea typeface="D2Coding"/>
+                <a:cs typeface="D2Coding"/>
               </a:rPr>
               <a:t>도메인(price)    = 0 이상의 정수  (CHECK 제약이 지킨다)</a:t>
             </a:r>
